--- a/cs701/slides/week-08.pptx
+++ b/cs701/slides/week-08.pptx
@@ -9704,7 +9704,7 @@
                   <a:srgbClr val="01AEFD"/>
                 </a:solidFill>
               </a:rPr>
-              <a:t>Type this into FindingDuplicates.java   -   line 1</a:t>
+              <a:t>Make a new file, FindingDuplicates.java, and type this in   -   line 1</a:t>
             </a:r>
           </a:p>
         </p:txBody>
@@ -9785,7 +9785,7 @@
                   <a:srgbClr val="DCECEF"/>
                 </a:solidFill>
               </a:rPr>
-              <a:t>Opens the class. Its name must be the file's name without .java - FindingDuplicates lives in FindingDuplicates.java - and every other line goes inside its braces.</a:t>
+              <a:t>Opens the class: FindingDuplicates, the file's name without .java.</a:t>
             </a:r>
           </a:p>
         </p:txBody>
@@ -16434,7 +16434,7 @@
                   <a:srgbClr val="01AEFD"/>
                 </a:solidFill>
               </a:rPr>
-              <a:t>Type this into FindMinimum.java   -   line 1</a:t>
+              <a:t>Make a new file, FindMinimum.java, and type this in   -   line 1</a:t>
             </a:r>
           </a:p>
         </p:txBody>
@@ -17755,7 +17755,7 @@
                   <a:srgbClr val="DCECEF"/>
                 </a:solidFill>
               </a:rPr>
-              <a:t>Opens the class. Its name must be the file's name without .java - FindMinimum lives in FindMinimum.java - and every other line goes inside its braces.</a:t>
+              <a:t>Opens the class: FindMinimum, the file's name without .java.</a:t>
             </a:r>
           </a:p>
         </p:txBody>
